--- a/docs/slides/COIL_3_midpoint_clinic.pptx
+++ b/docs/slides/COIL_3_midpoint_clinic.pptx
@@ -6404,7 +6404,7 @@
                 <a:ea typeface="Calibri" pitchFamily="34" charset="-122"/>
                 <a:cs typeface="Calibri" pitchFamily="34" charset="-120"/>
               </a:rPr>
-              <a:t>Python or R notebook (.ipynb, .Rmd or Quarto), or Gretl script (.inp) with its output, + exported HTML or PDF + your dataset (CSV or Excel). Submit it with the Submit button on the website.</a:t>
+              <a:t>Your analysis file (Python or R notebook, Gretl script or session, or Power BI file) + a PDF or HTML report with all results + your dataset (CSV or Excel). Submit it with the Submit button on the website.</a:t>
             </a:r>
             <a:endParaRPr lang="en-US" sz="1050" dirty="0"/>
           </a:p>

--- a/docs/slides/COIL_3_midpoint_clinic.pptx
+++ b/docs/slides/COIL_3_midpoint_clinic.pptx
@@ -1740,7 +1740,7 @@
                 <a:ea typeface="Calibri" pitchFamily="34" charset="-122"/>
                 <a:cs typeface="Calibri" pitchFamily="34" charset="-120"/>
               </a:rPr>
-              <a:t>Week 5 · 9 Nov – 15 Nov 2026 · 45 minutes · Microsoft Teams</a:t>
+              <a:t>Week 5 · 16 Nov – 22 Nov 2026 · 45 minutes · Microsoft Teams</a:t>
             </a:r>
             <a:endParaRPr lang="en-US" sz="1200" dirty="0"/>
           </a:p>
@@ -5937,7 +5937,7 @@
                 <a:ea typeface="Calibri" pitchFamily="34" charset="-122"/>
                 <a:cs typeface="Calibri" pitchFamily="34" charset="-120"/>
               </a:rPr>
-              <a:t>DUE SUNDAY 22 NOVEMBER, 23:59 CET</a:t>
+              <a:t>DUE SUNDAY 29 NOVEMBER, 23:59 CET</a:t>
             </a:r>
             <a:endParaRPr lang="en-US" sz="1000" dirty="0"/>
           </a:p>
@@ -6891,7 +6891,7 @@
                 <a:ea typeface="Calibri" pitchFamily="34" charset="-122"/>
                 <a:cs typeface="Calibri" pitchFamily="34" charset="-120"/>
               </a:rPr>
-              <a:t>Deliverable 2 due Sunday 22 November</a:t>
+              <a:t>Deliverable 2 due Sunday 29 November</a:t>
             </a:r>
             <a:endParaRPr lang="en-US" sz="1050" dirty="0"/>
           </a:p>
@@ -6994,7 +6994,7 @@
                 <a:ea typeface="Calibri" pitchFamily="34" charset="-122"/>
                 <a:cs typeface="Calibri" pitchFamily="34" charset="-120"/>
               </a:rPr>
-              <a:t>Dashboards and data storytelling</a:t>
+              <a:t>Dashboard, feedback and rehearsal</a:t>
             </a:r>
             <a:endParaRPr lang="en-US" sz="1200" dirty="0"/>
           </a:p>
@@ -7035,7 +7035,7 @@
                 <a:ea typeface="Calibri" pitchFamily="34" charset="-122"/>
                 <a:cs typeface="Calibri" pitchFamily="34" charset="-120"/>
               </a:rPr>
-              <a:t>A first version of your dashboard, shown to another team for feedback.</a:t>
+              <a:t>Final dashboard and slides ready after feedback from another team; the presentation has been rehearsed.</a:t>
             </a:r>
             <a:endParaRPr lang="en-US" sz="1050" dirty="0"/>
           </a:p>
@@ -7138,7 +7138,7 @@
                 <a:ea typeface="Calibri" pitchFamily="34" charset="-122"/>
                 <a:cs typeface="Calibri" pitchFamily="34" charset="-120"/>
               </a:rPr>
-              <a:t>Final dashboard and rehearsal</a:t>
+              <a:t>Joint online presentation and reflection</a:t>
             </a:r>
             <a:endParaRPr lang="en-US" sz="1200" dirty="0"/>
           </a:p>
@@ -7179,7 +7179,7 @@
                 <a:ea typeface="Calibri" pitchFamily="34" charset="-122"/>
                 <a:cs typeface="Calibri" pitchFamily="34" charset="-120"/>
               </a:rPr>
-              <a:t>Final dashboard and slides ready; the presentation has been rehearsed.</a:t>
+              <a:t>Deliverable 3 due Sunday 13 December</a:t>
             </a:r>
             <a:endParaRPr lang="en-US" sz="1050" dirty="0"/>
           </a:p>

--- a/docs/slides/COIL_3_midpoint_clinic.pptx
+++ b/docs/slides/COIL_3_midpoint_clinic.pptx
@@ -5978,7 +5978,7 @@
                 <a:ea typeface="Georgia" pitchFamily="34" charset="-122"/>
                 <a:cs typeface="Georgia" pitchFamily="34" charset="-120"/>
               </a:rPr>
-              <a:t>Deliverable 2 · Analysis notebook</a:t>
+              <a:t>Deliverable 2 · Analysis report</a:t>
             </a:r>
             <a:endParaRPr lang="en-US" sz="2400" dirty="0"/>
           </a:p>
@@ -6404,7 +6404,7 @@
                 <a:ea typeface="Calibri" pitchFamily="34" charset="-122"/>
                 <a:cs typeface="Calibri" pitchFamily="34" charset="-120"/>
               </a:rPr>
-              <a:t>Your analysis file (Python or R notebook, Gretl script or session, or Power BI file) + a PDF or HTML report with all results + your dataset (CSV or Excel). Submit it with the Submit button on the website.</a:t>
+              <a:t>Report made with the Word template, saved as PDF + your analysis file (Python or R notebook, Gretl script or Power BI file). Add your dataset only if you used data from outside the COIL dataset. Submit it with the Submit button on the website.</a:t>
             </a:r>
             <a:endParaRPr lang="en-US" sz="1050" dirty="0"/>
           </a:p>
